--- a/classes/parte-10-seguridad-en-la-nube-y-contenedores/230-seguridad-de-infrastructure-as-code-terraform/clase-230-presentacion.pptx
+++ b/classes/parte-10-seguridad-en-la-nube-y-contenedores/230-seguridad-de-infrastructure-as-code-terraform/clase-230-presentacion.pptx
@@ -17,6 +17,10 @@
     <p:sldId id="265" r:id="rId16"/>
     <p:sldId id="266" r:id="rId17"/>
     <p:sldId id="267" r:id="rId18"/>
+    <p:sldId id="268" r:id="rId19"/>
+    <p:sldId id="269" r:id="rId20"/>
+    <p:sldId id="270" r:id="rId21"/>
+    <p:sldId id="271" r:id="rId22"/>
   </p:sldIdLst>
   <p:sldSz cx="9144000" cy="6858000" type="screen4x3"/>
   <p:notesSz cx="6858000" cy="9144000"/>
@@ -3198,7 +3202,7 @@
                   <a:srgbClr val="0B3D2E"/>
                 </a:solidFill>
               </a:rPr>
-              <a:t>⚠️ Errores comunes</a:t>
+              <a:t>🧪 Laboratorio guiado</a:t>
             </a:r>
           </a:p>
         </p:txBody>
@@ -3236,67 +3240,97 @@
                   <a:srgbClr val="22282E"/>
                 </a:solidFill>
               </a:rPr>
-              <a:t>•  Secreto visible en terraform.tfstate — El recurso guardó el valor en el state; usa un gestor de secretos y cifra el backend.</a:t>
-            </a:r>
-          </a:p>
-          <a:p>
-            <a:pPr>
-              <a:spcAft>
-                <a:spcPts val="600"/>
-              </a:spcAft>
-            </a:pPr>
-            <a:r>
-              <a:rPr sz="1500">
-                <a:solidFill>
-                  <a:srgbClr val="22282E"/>
-                </a:solidFill>
-              </a:rPr>
-              <a:t>•  tfsec pasa pero el recurso sigue inseguro — Regla suprimida con #tfsec:ignore; revisa las supresiones injustificadas.</a:t>
-            </a:r>
-          </a:p>
-          <a:p>
-            <a:pPr>
-              <a:spcAft>
-                <a:spcPts val="600"/>
-              </a:spcAft>
-            </a:pPr>
-            <a:r>
-              <a:rPr sz="1500">
-                <a:solidFill>
-                  <a:srgbClr val="22282E"/>
-                </a:solidFill>
-              </a:rPr>
-              <a:t>•  Error acquiring the state lock — Otro apply en curso o lock huérfano; espera o libera con force-unlock con cuidado.</a:t>
-            </a:r>
-          </a:p>
-          <a:p>
-            <a:pPr>
-              <a:spcAft>
-                <a:spcPts val="600"/>
-              </a:spcAft>
-            </a:pPr>
-            <a:r>
-              <a:rPr sz="1500">
-                <a:solidFill>
-                  <a:srgbClr val="22282E"/>
-                </a:solidFill>
-              </a:rPr>
-              <a:t>•  Drift no detectado — Cambios fuera de Terraform; ejecuta plan periódicamente y usa detección de drift.</a:t>
-            </a:r>
-          </a:p>
-          <a:p>
-            <a:pPr>
-              <a:spcAft>
-                <a:spcPts val="600"/>
-              </a:spcAft>
-            </a:pPr>
-            <a:r>
-              <a:rPr sz="1500">
-                <a:solidFill>
-                  <a:srgbClr val="22282E"/>
-                </a:solidFill>
-              </a:rPr>
-              <a:t>•  Módulo malicioso o desactualizado — Origen no verificado; fija versión y usa fuentes confiables.</a:t>
+              <a:t>•  Escribe un módulo Terraform inseguro: un bucket con acl = "public-read", un security group con 0.0.0.0/0 en el puerto 22 y un recurso sin cifrado.</a:t>
+            </a:r>
+          </a:p>
+          <a:p>
+            <a:pPr>
+              <a:spcAft>
+                <a:spcPts val="600"/>
+              </a:spcAft>
+            </a:pPr>
+            <a:r>
+              <a:rPr sz="1500">
+                <a:solidFill>
+                  <a:srgbClr val="22282E"/>
+                </a:solidFill>
+              </a:rPr>
+              <a:t>•  Ejecuta tfsec . y checkov -d .; anota los identificadores de cada hallazgo y su severidad.</a:t>
+            </a:r>
+          </a:p>
+          <a:p>
+            <a:pPr>
+              <a:spcAft>
+                <a:spcPts val="600"/>
+              </a:spcAft>
+            </a:pPr>
+            <a:r>
+              <a:rPr sz="1500">
+                <a:solidFill>
+                  <a:srgbClr val="22282E"/>
+                </a:solidFill>
+              </a:rPr>
+              <a:t>•  Corrige el código: bloquea acceso público, restringe el SG a un rango, activa cifrado en reposo. Reejecuta los escáneres hasta 0 hallazgos altos.</a:t>
+            </a:r>
+          </a:p>
+          <a:p>
+            <a:pPr>
+              <a:spcAft>
+                <a:spcPts val="600"/>
+              </a:spcAft>
+            </a:pPr>
+            <a:r>
+              <a:rPr sz="1500">
+                <a:solidFill>
+                  <a:srgbClr val="22282E"/>
+                </a:solidFill>
+              </a:rPr>
+              <a:t>•  Configura un backend remoto cifrado con bloqueo (por ejemplo S3 + DynamoDB) y verifica que el state ya no queda en local sin protección.</a:t>
+            </a:r>
+          </a:p>
+          <a:p>
+            <a:pPr>
+              <a:spcAft>
+                <a:spcPts val="600"/>
+              </a:spcAft>
+            </a:pPr>
+            <a:r>
+              <a:rPr sz="1500">
+                <a:solidFill>
+                  <a:srgbClr val="22282E"/>
+                </a:solidFill>
+              </a:rPr>
+              <a:t>•  Elimina cualquier secreto del código; inyéctalo desde variables de entorno o un gestor de secretos y comprueba que no aparece en el .tf.</a:t>
+            </a:r>
+          </a:p>
+          <a:p>
+            <a:pPr>
+              <a:spcAft>
+                <a:spcPts val="600"/>
+              </a:spcAft>
+            </a:pPr>
+            <a:r>
+              <a:rPr sz="1500">
+                <a:solidFill>
+                  <a:srgbClr val="22282E"/>
+                </a:solidFill>
+              </a:rPr>
+              <a:t>•  Escribe una política OPA/Conftest que rechace planes con recursos sin cifrado o con acceso público, e intégrala tras terraform plan.</a:t>
+            </a:r>
+          </a:p>
+          <a:p>
+            <a:pPr>
+              <a:spcAft>
+                <a:spcPts val="600"/>
+              </a:spcAft>
+            </a:pPr>
+            <a:r>
+              <a:rPr sz="1500">
+                <a:solidFill>
+                  <a:srgbClr val="22282E"/>
+                </a:solidFill>
+              </a:rPr>
+              <a:t>•  Simula el pipeline: fmt → validate → tfsec/checkov → plan → conftest → (aprobación) → apply. Falla el pipeline si el escaneo encuentra un hallazgo crítico.</a:t>
             </a:r>
           </a:p>
         </p:txBody>
@@ -3347,7 +3381,7 @@
                   <a:srgbClr val="0B3D2E"/>
                 </a:solidFill>
               </a:rPr>
-              <a:t>❓ Preguntas frecuentes</a:t>
+              <a:t>✍️ Ejercicios</a:t>
             </a:r>
           </a:p>
         </p:txBody>
@@ -3385,82 +3419,82 @@
                   <a:srgbClr val="22282E"/>
                 </a:solidFill>
               </a:rPr>
-              <a:t>•  ❓ ¿Por qué el state de Terraform es sensible?</a:t>
-            </a:r>
-          </a:p>
-          <a:p>
-            <a:pPr>
-              <a:spcAft>
-                <a:spcPts val="600"/>
-              </a:spcAft>
-            </a:pPr>
-            <a:r>
-              <a:rPr sz="1500">
-                <a:solidFill>
-                  <a:srgbClr val="22282E"/>
-                </a:solidFill>
-              </a:rPr>
-              <a:t>•  Porque puede contener valores en texto plano (contraseñas de bases de datos, claves) y el mapa completo de tu infraestructura. Debe cifrarse en reposo, tener acceso restringido y bloqueo para evitar corrupción.</a:t>
-            </a:r>
-          </a:p>
-          <a:p>
-            <a:pPr>
-              <a:spcAft>
-                <a:spcPts val="600"/>
-              </a:spcAft>
-            </a:pPr>
-            <a:r>
-              <a:rPr sz="1500">
-                <a:solidFill>
-                  <a:srgbClr val="22282E"/>
-                </a:solidFill>
-              </a:rPr>
-              <a:t>•  ❓ ¿tfsec o Checkov?</a:t>
-            </a:r>
-          </a:p>
-          <a:p>
-            <a:pPr>
-              <a:spcAft>
-                <a:spcPts val="600"/>
-              </a:spcAft>
-            </a:pPr>
-            <a:r>
-              <a:rPr sz="1500">
-                <a:solidFill>
-                  <a:srgbClr val="22282E"/>
-                </a:solidFill>
-              </a:rPr>
-              <a:t>•  Ambos son buenos; suelen usarse juntos porque sus reglas no coinciden al 100%. Checkov cubre más frameworks (Terraform, CloudFormation, Kubernetes) y tfsec es muy rápido para Terraform. Ejecuta los dos en CI.</a:t>
-            </a:r>
-          </a:p>
-          <a:p>
-            <a:pPr>
-              <a:spcAft>
-                <a:spcPts val="600"/>
-              </a:spcAft>
-            </a:pPr>
-            <a:r>
-              <a:rPr sz="1500">
-                <a:solidFill>
-                  <a:srgbClr val="22282E"/>
-                </a:solidFill>
-              </a:rPr>
-              <a:t>•  ❓ ¿El escaneo estático reemplaza al CSPM?</a:t>
-            </a:r>
-          </a:p>
-          <a:p>
-            <a:pPr>
-              <a:spcAft>
-                <a:spcPts val="600"/>
-              </a:spcAft>
-            </a:pPr>
-            <a:r>
-              <a:rPr sz="1500">
-                <a:solidFill>
-                  <a:srgbClr val="22282E"/>
-                </a:solidFill>
-              </a:rPr>
-              <a:t>•  No. El escaneo IaC detecta problemas antes de desplegar (shift-left); el CSPM (clase 231) evalúa lo ya desplegado en tiempo de ejecución, incluyendo cambios hechos fuera de Terraform. Se complementan.</a:t>
+              <a:t>•  Corrige un hallazgo concreto de tfsec y documenta la regla que lo detectó.</a:t>
+            </a:r>
+          </a:p>
+          <a:p>
+            <a:pPr>
+              <a:spcAft>
+                <a:spcPts val="600"/>
+              </a:spcAft>
+            </a:pPr>
+            <a:r>
+              <a:rPr sz="1500">
+                <a:solidFill>
+                  <a:srgbClr val="22282E"/>
+                </a:solidFill>
+              </a:rPr>
+              <a:t>•  Migra un state local a un backend remoto cifrado con bloqueo.</a:t>
+            </a:r>
+          </a:p>
+          <a:p>
+            <a:pPr>
+              <a:spcAft>
+                <a:spcPts val="600"/>
+              </a:spcAft>
+            </a:pPr>
+            <a:r>
+              <a:rPr sz="1500">
+                <a:solidFill>
+                  <a:srgbClr val="22282E"/>
+                </a:solidFill>
+              </a:rPr>
+              <a:t>•  Escribe una política Rego que exija etiquetas obligatorias en todos los recursos.</a:t>
+            </a:r>
+          </a:p>
+          <a:p>
+            <a:pPr>
+              <a:spcAft>
+                <a:spcPts val="600"/>
+              </a:spcAft>
+            </a:pPr>
+            <a:r>
+              <a:rPr sz="1500">
+                <a:solidFill>
+                  <a:srgbClr val="22282E"/>
+                </a:solidFill>
+              </a:rPr>
+              <a:t>•  Detecta drift introduciendo un cambio manual y ejecutando terraform plan.</a:t>
+            </a:r>
+          </a:p>
+          <a:p>
+            <a:pPr>
+              <a:spcAft>
+                <a:spcPts val="600"/>
+              </a:spcAft>
+            </a:pPr>
+            <a:r>
+              <a:rPr sz="1500">
+                <a:solidFill>
+                  <a:srgbClr val="22282E"/>
+                </a:solidFill>
+              </a:rPr>
+              <a:t>•  Fija (pin) la versión de un módulo y de un proveedor y explica por qué.</a:t>
+            </a:r>
+          </a:p>
+          <a:p>
+            <a:pPr>
+              <a:spcAft>
+                <a:spcPts val="600"/>
+              </a:spcAft>
+            </a:pPr>
+            <a:r>
+              <a:rPr sz="1500">
+                <a:solidFill>
+                  <a:srgbClr val="22282E"/>
+                </a:solidFill>
+              </a:rPr>
+              <a:t>•  Integra el escaneo IaC como paso obligatorio en un workflow de CI.</a:t>
             </a:r>
           </a:p>
         </p:txBody>
@@ -3511,7 +3545,7 @@
                   <a:srgbClr val="0B3D2E"/>
                 </a:solidFill>
               </a:rPr>
-              <a:t>🔗 Referencias</a:t>
+              <a:t>📝 Reto verificable</a:t>
             </a:r>
           </a:p>
         </p:txBody>
@@ -3549,71 +3583,638 @@
                   <a:srgbClr val="22282E"/>
                 </a:solidFill>
               </a:rPr>
-              <a:t>•  Terraform docs — Backends y state. &lt;https://developer.hashicorp.com/terraform/language/state&gt;</a:t>
-            </a:r>
-          </a:p>
-          <a:p>
-            <a:pPr>
-              <a:spcAft>
-                <a:spcPts val="600"/>
-              </a:spcAft>
-            </a:pPr>
-            <a:r>
-              <a:rPr sz="1500">
-                <a:solidFill>
-                  <a:srgbClr val="22282E"/>
-                </a:solidFill>
-              </a:rPr>
-              <a:t>•  tfsec. &lt;https://github.com/aquasecurity/tfsec&gt;</a:t>
-            </a:r>
-          </a:p>
-          <a:p>
-            <a:pPr>
-              <a:spcAft>
-                <a:spcPts val="600"/>
-              </a:spcAft>
-            </a:pPr>
-            <a:r>
-              <a:rPr sz="1500">
-                <a:solidFill>
-                  <a:srgbClr val="22282E"/>
-                </a:solidFill>
-              </a:rPr>
-              <a:t>•  Checkov. &lt;https://www.checkov.io/&gt;</a:t>
-            </a:r>
-          </a:p>
-          <a:p>
-            <a:pPr>
-              <a:spcAft>
-                <a:spcPts val="600"/>
-              </a:spcAft>
-            </a:pPr>
-            <a:r>
-              <a:rPr sz="1500">
-                <a:solidFill>
-                  <a:srgbClr val="22282E"/>
-                </a:solidFill>
-              </a:rPr>
-              <a:t>•  Open Policy Agent / Conftest. &lt;https://www.openpolicyagent.org/&gt;</a:t>
-            </a:r>
-          </a:p>
-          <a:p>
-            <a:pPr>
-              <a:spcAft>
-                <a:spcPts val="600"/>
-              </a:spcAft>
-            </a:pPr>
-            <a:r>
-              <a:rPr sz="1500">
-                <a:solidFill>
-                  <a:srgbClr val="22282E"/>
-                </a:solidFill>
-              </a:rPr>
-              <a:t>•  OWASP Infrastructure as Code Security Cheat Sheet. &lt;https://cheatsheetseries.owasp.org/cheatsheets/InfrastructureasCodeSecurityCheatSheet.html&gt;</a:t>
-            </a:r>
-          </a:p>
-        </p:txBody>
-      </p:sp>
+              <a:t>•  Toma un repositorio Terraform con misconfiguraciones y déjalo "verde": sin hallazgos críticos en</a:t>
+            </a:r>
+          </a:p>
+          <a:p>
+            <a:pPr>
+              <a:spcAft>
+                <a:spcPts val="600"/>
+              </a:spcAft>
+            </a:pPr>
+            <a:r>
+              <a:rPr sz="1500">
+                <a:solidFill>
+                  <a:srgbClr val="22282E"/>
+                </a:solidFill>
+              </a:rPr>
+              <a:t>•  tfsec/Checkov, con state remoto cifrado y bloqueado, sin secretos en el código, y con una policy OPA</a:t>
+            </a:r>
+          </a:p>
+          <a:p>
+            <a:pPr>
+              <a:spcAft>
+                <a:spcPts val="600"/>
+              </a:spcAft>
+            </a:pPr>
+            <a:r>
+              <a:rPr sz="1500">
+                <a:solidFill>
+                  <a:srgbClr val="22282E"/>
+                </a:solidFill>
+              </a:rPr>
+              <a:t>•  que bloquea recursos inseguros en el pipeline.</a:t>
+            </a:r>
+          </a:p>
+          <a:p>
+            <a:pPr>
+              <a:spcAft>
+                <a:spcPts val="600"/>
+              </a:spcAft>
+            </a:pPr>
+            <a:r>
+              <a:rPr sz="1500">
+                <a:solidFill>
+                  <a:srgbClr val="22282E"/>
+                </a:solidFill>
+              </a:rPr>
+              <a:t>•  Criterio de aceptación: tfsec y checkov reportan 0 hallazgos críticos/altos, conftest</a:t>
+            </a:r>
+          </a:p>
+          <a:p>
+            <a:pPr>
+              <a:spcAft>
+                <a:spcPts val="600"/>
+              </a:spcAft>
+            </a:pPr>
+            <a:r>
+              <a:rPr sz="1500">
+                <a:solidFill>
+                  <a:srgbClr val="22282E"/>
+                </a:solidFill>
+              </a:rPr>
+              <a:t>•  rechaza un plan que reintroduzca un bucket público, y no hay ningún secreto en texto plano en los</a:t>
+            </a:r>
+          </a:p>
+          <a:p>
+            <a:pPr>
+              <a:spcAft>
+                <a:spcPts val="600"/>
+              </a:spcAft>
+            </a:pPr>
+            <a:r>
+              <a:rPr sz="1500">
+                <a:solidFill>
+                  <a:srgbClr val="22282E"/>
+                </a:solidFill>
+              </a:rPr>
+              <a:t>•  .tf ni en el backend.</a:t>
+            </a:r>
+          </a:p>
+        </p:txBody>
+      </p:sp>
+    </p:spTree>
+  </p:cSld>
+  <p:clrMapOvr>
+    <a:masterClrMapping/>
+  </p:clrMapOvr>
+</p:sld>
+</file>
+
+<file path=ppt/slides/slide13.xml><?xml version="1.0" encoding="utf-8"?>
+<p:sld xmlns:a="http://schemas.openxmlformats.org/drawingml/2006/main" xmlns:p="http://schemas.openxmlformats.org/presentationml/2006/main" xmlns:r="http://schemas.openxmlformats.org/officeDocument/2006/relationships">
+  <p:cSld>
+    <p:spTree>
+      <p:nvGrpSpPr>
+        <p:cNvPr id="1" name=""/>
+        <p:cNvGrpSpPr/>
+        <p:nvPr/>
+      </p:nvGrpSpPr>
+      <p:grpSpPr/>
+      <p:sp>
+        <p:nvSpPr>
+          <p:cNvPr id="2" name="TextBox 1"/>
+          <p:cNvSpPr txBox="1"/>
+          <p:nvPr/>
+        </p:nvSpPr>
+        <p:spPr>
+          <a:xfrm>
+            <a:off x="457200" y="320040"/>
+            <a:ext cx="8229600" cy="822960"/>
+          </a:xfrm>
+          <a:prstGeom prst="rect">
+            <a:avLst/>
+          </a:prstGeom>
+          <a:noFill/>
+        </p:spPr>
+        <p:txBody>
+          <a:bodyPr wrap="square">
+            <a:spAutoFit/>
+          </a:bodyPr>
+          <a:lstStyle/>
+          <a:p>
+            <a:r>
+              <a:rPr sz="2600" b="1">
+                <a:solidFill>
+                  <a:srgbClr val="0B3D2E"/>
+                </a:solidFill>
+              </a:rPr>
+              <a:t>⚠️ Errores comunes</a:t>
+            </a:r>
+          </a:p>
+        </p:txBody>
+      </p:sp>
+      <p:sp>
+        <p:nvSpPr>
+          <p:cNvPr id="3" name="TextBox 2"/>
+          <p:cNvSpPr txBox="1"/>
+          <p:nvPr/>
+        </p:nvSpPr>
+        <p:spPr>
+          <a:xfrm>
+            <a:off x="457200" y="1280160"/>
+            <a:ext cx="8229600" cy="4937760"/>
+          </a:xfrm>
+          <a:prstGeom prst="rect">
+            <a:avLst/>
+          </a:prstGeom>
+          <a:noFill/>
+        </p:spPr>
+        <p:txBody>
+          <a:bodyPr wrap="square">
+            <a:spAutoFit/>
+          </a:bodyPr>
+          <a:lstStyle/>
+          <a:p>
+            <a:pPr>
+              <a:spcAft>
+                <a:spcPts val="600"/>
+              </a:spcAft>
+            </a:pPr>
+            <a:r>
+              <a:rPr sz="1500">
+                <a:solidFill>
+                  <a:srgbClr val="22282E"/>
+                </a:solidFill>
+              </a:rPr>
+              <a:t>•  Secreto visible en terraform.tfstate — El recurso guardó el valor en el state; usa un gestor de secretos y cifra el backend.</a:t>
+            </a:r>
+          </a:p>
+          <a:p>
+            <a:pPr>
+              <a:spcAft>
+                <a:spcPts val="600"/>
+              </a:spcAft>
+            </a:pPr>
+            <a:r>
+              <a:rPr sz="1500">
+                <a:solidFill>
+                  <a:srgbClr val="22282E"/>
+                </a:solidFill>
+              </a:rPr>
+              <a:t>•  tfsec pasa pero el recurso sigue inseguro — Regla suprimida con #tfsec:ignore; revisa las supresiones injustificadas.</a:t>
+            </a:r>
+          </a:p>
+          <a:p>
+            <a:pPr>
+              <a:spcAft>
+                <a:spcPts val="600"/>
+              </a:spcAft>
+            </a:pPr>
+            <a:r>
+              <a:rPr sz="1500">
+                <a:solidFill>
+                  <a:srgbClr val="22282E"/>
+                </a:solidFill>
+              </a:rPr>
+              <a:t>•  Error acquiring the state lock — Otro apply en curso o lock huérfano; espera o libera con force-unlock con cuidado.</a:t>
+            </a:r>
+          </a:p>
+          <a:p>
+            <a:pPr>
+              <a:spcAft>
+                <a:spcPts val="600"/>
+              </a:spcAft>
+            </a:pPr>
+            <a:r>
+              <a:rPr sz="1500">
+                <a:solidFill>
+                  <a:srgbClr val="22282E"/>
+                </a:solidFill>
+              </a:rPr>
+              <a:t>•  Drift no detectado — Cambios fuera de Terraform; ejecuta plan periódicamente y usa detección de drift.</a:t>
+            </a:r>
+          </a:p>
+          <a:p>
+            <a:pPr>
+              <a:spcAft>
+                <a:spcPts val="600"/>
+              </a:spcAft>
+            </a:pPr>
+            <a:r>
+              <a:rPr sz="1500">
+                <a:solidFill>
+                  <a:srgbClr val="22282E"/>
+                </a:solidFill>
+              </a:rPr>
+              <a:t>•  Módulo malicioso o desactualizado — Origen no verificado; fija versión y usa fuentes confiables.</a:t>
+            </a:r>
+          </a:p>
+        </p:txBody>
+      </p:sp>
+    </p:spTree>
+  </p:cSld>
+  <p:clrMapOvr>
+    <a:masterClrMapping/>
+  </p:clrMapOvr>
+</p:sld>
+</file>
+
+<file path=ppt/slides/slide14.xml><?xml version="1.0" encoding="utf-8"?>
+<p:sld xmlns:a="http://schemas.openxmlformats.org/drawingml/2006/main" xmlns:p="http://schemas.openxmlformats.org/presentationml/2006/main" xmlns:r="http://schemas.openxmlformats.org/officeDocument/2006/relationships">
+  <p:cSld>
+    <p:spTree>
+      <p:nvGrpSpPr>
+        <p:cNvPr id="1" name=""/>
+        <p:cNvGrpSpPr/>
+        <p:nvPr/>
+      </p:nvGrpSpPr>
+      <p:grpSpPr/>
+      <p:sp>
+        <p:nvSpPr>
+          <p:cNvPr id="2" name="TextBox 1"/>
+          <p:cNvSpPr txBox="1"/>
+          <p:nvPr/>
+        </p:nvSpPr>
+        <p:spPr>
+          <a:xfrm>
+            <a:off x="457200" y="320040"/>
+            <a:ext cx="8229600" cy="822960"/>
+          </a:xfrm>
+          <a:prstGeom prst="rect">
+            <a:avLst/>
+          </a:prstGeom>
+          <a:noFill/>
+        </p:spPr>
+        <p:txBody>
+          <a:bodyPr wrap="square">
+            <a:spAutoFit/>
+          </a:bodyPr>
+          <a:lstStyle/>
+          <a:p>
+            <a:r>
+              <a:rPr sz="2600" b="1">
+                <a:solidFill>
+                  <a:srgbClr val="0B3D2E"/>
+                </a:solidFill>
+              </a:rPr>
+              <a:t>❓ Preguntas frecuentes</a:t>
+            </a:r>
+          </a:p>
+        </p:txBody>
+      </p:sp>
+      <p:sp>
+        <p:nvSpPr>
+          <p:cNvPr id="3" name="TextBox 2"/>
+          <p:cNvSpPr txBox="1"/>
+          <p:nvPr/>
+        </p:nvSpPr>
+        <p:spPr>
+          <a:xfrm>
+            <a:off x="457200" y="1280160"/>
+            <a:ext cx="8229600" cy="4937760"/>
+          </a:xfrm>
+          <a:prstGeom prst="rect">
+            <a:avLst/>
+          </a:prstGeom>
+          <a:noFill/>
+        </p:spPr>
+        <p:txBody>
+          <a:bodyPr wrap="square">
+            <a:spAutoFit/>
+          </a:bodyPr>
+          <a:lstStyle/>
+          <a:p>
+            <a:pPr>
+              <a:spcAft>
+                <a:spcPts val="600"/>
+              </a:spcAft>
+            </a:pPr>
+            <a:r>
+              <a:rPr sz="1500">
+                <a:solidFill>
+                  <a:srgbClr val="22282E"/>
+                </a:solidFill>
+              </a:rPr>
+              <a:t>•  ❓ ¿Por qué el state de Terraform es sensible?</a:t>
+            </a:r>
+          </a:p>
+          <a:p>
+            <a:pPr>
+              <a:spcAft>
+                <a:spcPts val="600"/>
+              </a:spcAft>
+            </a:pPr>
+            <a:r>
+              <a:rPr sz="1500">
+                <a:solidFill>
+                  <a:srgbClr val="22282E"/>
+                </a:solidFill>
+              </a:rPr>
+              <a:t>•  Porque puede contener valores en texto plano (contraseñas de bases de datos, claves) y el mapa completo de tu infraestructura. Debe cifrarse en reposo, tener acceso restringido y bloqueo para evitar…</a:t>
+            </a:r>
+          </a:p>
+          <a:p>
+            <a:pPr>
+              <a:spcAft>
+                <a:spcPts val="600"/>
+              </a:spcAft>
+            </a:pPr>
+            <a:r>
+              <a:rPr sz="1500">
+                <a:solidFill>
+                  <a:srgbClr val="22282E"/>
+                </a:solidFill>
+              </a:rPr>
+              <a:t>•  ❓ ¿tfsec o Checkov?</a:t>
+            </a:r>
+          </a:p>
+          <a:p>
+            <a:pPr>
+              <a:spcAft>
+                <a:spcPts val="600"/>
+              </a:spcAft>
+            </a:pPr>
+            <a:r>
+              <a:rPr sz="1500">
+                <a:solidFill>
+                  <a:srgbClr val="22282E"/>
+                </a:solidFill>
+              </a:rPr>
+              <a:t>•  Ambos son buenos; suelen usarse juntos porque sus reglas no coinciden al 100%. Checkov cubre más frameworks (Terraform, CloudFormation, Kubernetes) y tfsec es muy rápido para Terraform. Ejecuta los…</a:t>
+            </a:r>
+          </a:p>
+          <a:p>
+            <a:pPr>
+              <a:spcAft>
+                <a:spcPts val="600"/>
+              </a:spcAft>
+            </a:pPr>
+            <a:r>
+              <a:rPr sz="1500">
+                <a:solidFill>
+                  <a:srgbClr val="22282E"/>
+                </a:solidFill>
+              </a:rPr>
+              <a:t>•  ❓ ¿El escaneo estático reemplaza al CSPM?</a:t>
+            </a:r>
+          </a:p>
+          <a:p>
+            <a:pPr>
+              <a:spcAft>
+                <a:spcPts val="600"/>
+              </a:spcAft>
+            </a:pPr>
+            <a:r>
+              <a:rPr sz="1500">
+                <a:solidFill>
+                  <a:srgbClr val="22282E"/>
+                </a:solidFill>
+              </a:rPr>
+              <a:t>•  No. El escaneo IaC detecta problemas antes de desplegar (shift-left); el CSPM (clase 231) evalúa lo ya desplegado en tiempo de ejecución, incluyendo cambios hechos fuera de Terraform. Se complementan.</a:t>
+            </a:r>
+          </a:p>
+        </p:txBody>
+      </p:sp>
+    </p:spTree>
+  </p:cSld>
+  <p:clrMapOvr>
+    <a:masterClrMapping/>
+  </p:clrMapOvr>
+</p:sld>
+</file>
+
+<file path=ppt/slides/slide15.xml><?xml version="1.0" encoding="utf-8"?>
+<p:sld xmlns:a="http://schemas.openxmlformats.org/drawingml/2006/main" xmlns:p="http://schemas.openxmlformats.org/presentationml/2006/main" xmlns:r="http://schemas.openxmlformats.org/officeDocument/2006/relationships">
+  <p:cSld>
+    <p:spTree>
+      <p:nvGrpSpPr>
+        <p:cNvPr id="1" name=""/>
+        <p:cNvGrpSpPr/>
+        <p:nvPr/>
+      </p:nvGrpSpPr>
+      <p:grpSpPr/>
+      <p:sp>
+        <p:nvSpPr>
+          <p:cNvPr id="2" name="TextBox 1"/>
+          <p:cNvSpPr txBox="1"/>
+          <p:nvPr/>
+        </p:nvSpPr>
+        <p:spPr>
+          <a:xfrm>
+            <a:off x="457200" y="320040"/>
+            <a:ext cx="8229600" cy="822960"/>
+          </a:xfrm>
+          <a:prstGeom prst="rect">
+            <a:avLst/>
+          </a:prstGeom>
+          <a:noFill/>
+        </p:spPr>
+        <p:txBody>
+          <a:bodyPr wrap="square">
+            <a:spAutoFit/>
+          </a:bodyPr>
+          <a:lstStyle/>
+          <a:p>
+            <a:r>
+              <a:rPr sz="2600" b="1">
+                <a:solidFill>
+                  <a:srgbClr val="0B3D2E"/>
+                </a:solidFill>
+              </a:rPr>
+              <a:t>🔗 Referencias verificables y alcance</a:t>
+            </a:r>
+          </a:p>
+        </p:txBody>
+      </p:sp>
+      <p:sp>
+        <p:nvSpPr>
+          <p:cNvPr id="3" name="TextBox 2"/>
+          <p:cNvSpPr txBox="1"/>
+          <p:nvPr/>
+        </p:nvSpPr>
+        <p:spPr>
+          <a:xfrm>
+            <a:off x="457200" y="1280160"/>
+            <a:ext cx="8229600" cy="4937760"/>
+          </a:xfrm>
+          <a:prstGeom prst="rect">
+            <a:avLst/>
+          </a:prstGeom>
+          <a:noFill/>
+        </p:spPr>
+        <p:txBody>
+          <a:bodyPr wrap="square">
+            <a:spAutoFit/>
+          </a:bodyPr>
+          <a:lstStyle/>
+          <a:p>
+            <a:pPr>
+              <a:spcAft>
+                <a:spcPts val="600"/>
+              </a:spcAft>
+            </a:pPr>
+            <a:r>
+              <a:rPr sz="1500">
+                <a:solidFill>
+                  <a:srgbClr val="22282E"/>
+                </a:solidFill>
+              </a:rPr>
+              <a:t>•  Terraform — State. &lt;https://developer.hashicorp.com/terraform/language/state&gt; — propósito, almacenamiento y operación oficial.</a:t>
+            </a:r>
+          </a:p>
+          <a:p>
+            <a:pPr>
+              <a:spcAft>
+                <a:spcPts val="600"/>
+              </a:spcAft>
+            </a:pPr>
+            <a:r>
+              <a:rPr sz="1500">
+                <a:solidFill>
+                  <a:srgbClr val="22282E"/>
+                </a:solidFill>
+              </a:rPr>
+              <a:t>•  Terraform — Manage sensitive data. &lt;https://developer.hashicorp.com/terraform/language/manage-sensitive-data&gt; — diferencias vigentes entre sensitive, ephemeral y write-only, con requisitos de versión.</a:t>
+            </a:r>
+          </a:p>
+          <a:p>
+            <a:pPr>
+              <a:spcAft>
+                <a:spcPts val="600"/>
+              </a:spcAft>
+            </a:pPr>
+            <a:r>
+              <a:rPr sz="1500">
+                <a:solidFill>
+                  <a:srgbClr val="22282E"/>
+                </a:solidFill>
+              </a:rPr>
+              <a:t>•  Terraform — Dependency lock file. &lt;https://developer.hashicorp.com/terraform/language/files/dependency-lock&gt; — alcance de selección y hashes de providers.</a:t>
+            </a:r>
+          </a:p>
+          <a:p>
+            <a:pPr>
+              <a:spcAft>
+                <a:spcPts val="600"/>
+              </a:spcAft>
+            </a:pPr>
+            <a:r>
+              <a:rPr sz="1500">
+                <a:solidFill>
+                  <a:srgbClr val="22282E"/>
+                </a:solidFill>
+              </a:rPr>
+              <a:t>•  Open Policy Agent — Terraform. &lt;https://www.openpolicyagent.org/docs/terraform&gt; — evaluación de plan y limitaciones de valores desconocidos.</a:t>
+            </a:r>
+          </a:p>
+          <a:p>
+            <a:pPr>
+              <a:spcAft>
+                <a:spcPts val="600"/>
+              </a:spcAft>
+            </a:pPr>
+            <a:r>
+              <a:rPr sz="1500">
+                <a:solidFill>
+                  <a:srgbClr val="22282E"/>
+                </a:solidFill>
+              </a:rPr>
+              <a:t>•  Checkov. &lt;https://www.checkov.io/&gt; y tfsec. &lt;https://github.com/aquasecurity/tfsec&gt; — herramientas primarias; documentar versión, reglas y supresiones.</a:t>
+            </a:r>
+          </a:p>
+          <a:p>
+            <a:pPr>
+              <a:spcAft>
+                <a:spcPts val="600"/>
+              </a:spcAft>
+            </a:pPr>
+            <a:r>
+              <a:rPr sz="1500">
+                <a:solidFill>
+                  <a:srgbClr val="22282E"/>
+                </a:solidFill>
+              </a:rPr>
+              <a:t>•  OWASP IaC Security Cheat Sheet. &lt;https://cheatsheetseries.owasp.org/cheatsheets/InfrastructureasCodeSecurityCheatSheet.html&gt; — recomendaciones complementarias, no especificación de Terraform.</a:t>
+            </a:r>
+          </a:p>
+        </p:txBody>
+      </p:sp>
+    </p:spTree>
+  </p:cSld>
+  <p:clrMapOvr>
+    <a:masterClrMapping/>
+  </p:clrMapOvr>
+</p:sld>
+</file>
+
+<file path=ppt/slides/slide16.xml><?xml version="1.0" encoding="utf-8"?>
+<p:sld xmlns:a="http://schemas.openxmlformats.org/drawingml/2006/main" xmlns:p="http://schemas.openxmlformats.org/presentationml/2006/main" xmlns:r="http://schemas.openxmlformats.org/officeDocument/2006/relationships">
+  <p:cSld>
+    <p:spTree>
+      <p:nvGrpSpPr>
+        <p:cNvPr id="1" name=""/>
+        <p:cNvGrpSpPr/>
+        <p:nvPr/>
+      </p:nvGrpSpPr>
+      <p:grpSpPr/>
+      <p:sp>
+        <p:nvSpPr>
+          <p:cNvPr id="2" name="TextBox 1"/>
+          <p:cNvSpPr txBox="1"/>
+          <p:nvPr/>
+        </p:nvSpPr>
+        <p:spPr>
+          <a:xfrm>
+            <a:off x="457200" y="274320"/>
+            <a:ext cx="8229600" cy="640080"/>
+          </a:xfrm>
+          <a:prstGeom prst="rect">
+            <a:avLst/>
+          </a:prstGeom>
+          <a:noFill/>
+        </p:spPr>
+        <p:txBody>
+          <a:bodyPr wrap="square">
+            <a:spAutoFit/>
+          </a:bodyPr>
+          <a:lstStyle/>
+          <a:p>
+            <a:r>
+              <a:rPr sz="2200" b="1">
+                <a:solidFill>
+                  <a:srgbClr val="0B3D2E"/>
+                </a:solidFill>
+              </a:rPr>
+              <a:t>Diagrama de la clase</a:t>
+            </a:r>
+          </a:p>
+        </p:txBody>
+      </p:sp>
+      <p:pic>
+        <p:nvPicPr>
+          <p:cNvPr id="3" name="Picture 2" descr="fa7845027cee8e80.png"/>
+          <p:cNvPicPr>
+            <a:picLocks noChangeAspect="1"/>
+          </p:cNvPicPr>
+          <p:nvPr/>
+        </p:nvPicPr>
+        <p:blipFill>
+          <a:blip r:embed="rId2"/>
+          <a:stretch>
+            <a:fillRect/>
+          </a:stretch>
+        </p:blipFill>
+        <p:spPr>
+          <a:xfrm>
+            <a:off x="457200" y="3200400"/>
+            <a:ext cx="8229600" cy="1097280"/>
+          </a:xfrm>
+          <a:prstGeom prst="rect">
+            <a:avLst/>
+          </a:prstGeom>
+        </p:spPr>
+      </p:pic>
     </p:spTree>
   </p:cSld>
   <p:clrMapOvr>
@@ -4041,7 +4642,7 @@
                   <a:srgbClr val="22282E"/>
                 </a:solidFill>
               </a:rPr>
-              <a:t>•  4 — Secretos en Terraform</a:t>
+              <a:t>•  4 — Datos sensibles en configuración, plan y state</a:t>
             </a:r>
           </a:p>
           <a:p>
@@ -4137,7 +4738,7 @@
                   <a:srgbClr val="0B3D2E"/>
                 </a:solidFill>
               </a:rPr>
-              <a:t>📖 Definiciones y características</a:t>
+              <a:t>🧠 Explicación en profundidad</a:t>
             </a:r>
           </a:p>
         </p:txBody>
@@ -4175,97 +4776,82 @@
                   <a:srgbClr val="22282E"/>
                 </a:solidFill>
               </a:rPr>
-              <a:t>•  Infrastructure as Code (IaC): definir infraestructura en archivos versionados. Clave: auditable y reproducible, pero un error se replica a escala.</a:t>
-            </a:r>
-          </a:p>
-          <a:p>
-            <a:pPr>
-              <a:spcAft>
-                <a:spcPts val="600"/>
-              </a:spcAft>
-            </a:pPr>
-            <a:r>
-              <a:rPr sz="1500">
-                <a:solidFill>
-                  <a:srgbClr val="22282E"/>
-                </a:solidFill>
-              </a:rPr>
-              <a:t>•  Terraform state: archivo con el mapeo entre código y recursos reales. Clave: puede contener secretos en texto plano; protégelo.</a:t>
-            </a:r>
-          </a:p>
-          <a:p>
-            <a:pPr>
-              <a:spcAft>
-                <a:spcPts val="600"/>
-              </a:spcAft>
-            </a:pPr>
-            <a:r>
-              <a:rPr sz="1500">
-                <a:solidFill>
-                  <a:srgbClr val="22282E"/>
-                </a:solidFill>
-              </a:rPr>
-              <a:t>•  Drift: divergencia entre el código y la infraestructura real. Clave: terraform plan lo detecta.</a:t>
-            </a:r>
-          </a:p>
-          <a:p>
-            <a:pPr>
-              <a:spcAft>
-                <a:spcPts val="600"/>
-              </a:spcAft>
-            </a:pPr>
-            <a:r>
-              <a:rPr sz="1500">
-                <a:solidFill>
-                  <a:srgbClr val="22282E"/>
-                </a:solidFill>
-              </a:rPr>
-              <a:t>•  tfsec / Checkov: escáneres estáticos de IaC. Clave: encuentran buckets públicos, SG abiertos, cifrado ausente.</a:t>
-            </a:r>
-          </a:p>
-          <a:p>
-            <a:pPr>
-              <a:spcAft>
-                <a:spcPts val="600"/>
-              </a:spcAft>
-            </a:pPr>
-            <a:r>
-              <a:rPr sz="1500">
-                <a:solidFill>
-                  <a:srgbClr val="22282E"/>
-                </a:solidFill>
-              </a:rPr>
-              <a:t>•  Policy-as-code: reglas (OPA/Rego, Sentinel) que aprueban o bloquean planes. Clave: impide desplegar lo no conforme.</a:t>
-            </a:r>
-          </a:p>
-          <a:p>
-            <a:pPr>
-              <a:spcAft>
-                <a:spcPts val="600"/>
-              </a:spcAft>
-            </a:pPr>
-            <a:r>
-              <a:rPr sz="1500">
-                <a:solidFill>
-                  <a:srgbClr val="22282E"/>
-                </a:solidFill>
-              </a:rPr>
-              <a:t>•  Backend remoto: almacenamiento del state (S3+DynamoDB, GCS, Terraform Cloud). Clave: habilita cifrado y bloqueo concurrente.</a:t>
-            </a:r>
-          </a:p>
-          <a:p>
-            <a:pPr>
-              <a:spcAft>
-                <a:spcPts val="600"/>
-              </a:spcAft>
-            </a:pPr>
-            <a:r>
-              <a:rPr sz="1500">
-                <a:solidFill>
-                  <a:srgbClr val="22282E"/>
-                </a:solidFill>
-              </a:rPr>
-              <a:t>•  Módulo: paquete reutilizable de Terraform. Clave: verifica origen y versión para la cadena de suministro.</a:t>
+              <a:t>•  Terraform compara configuración, state y objetos remotos para producir un plan. Seguridad debe revisar los tres: HCL expresa intención, el plan muestra cambios calculados y el state enlaza…</a:t>
+            </a:r>
+          </a:p>
+          <a:p>
+            <a:pPr>
+              <a:spcAft>
+                <a:spcPts val="600"/>
+              </a:spcAft>
+            </a:pPr>
+            <a:r>
+              <a:rPr sz="1500">
+                <a:solidFill>
+                  <a:srgbClr val="22282E"/>
+                </a:solidFill>
+              </a:rPr>
+              <a:t>•  El diagrama incluye dependencias y credencial de ejecución porque el pipeline es parte de la superficie. El archivo .terraform.lock.hcl fija selecciones y hashes de providers, pero actualmente no…</a:t>
+            </a:r>
+          </a:p>
+          <a:p>
+            <a:pPr>
+              <a:spcAft>
+                <a:spcPts val="600"/>
+              </a:spcAft>
+            </a:pPr>
+            <a:r>
+              <a:rPr sz="1500">
+                <a:solidFill>
+                  <a:srgbClr val="22282E"/>
+                </a:solidFill>
+              </a:rPr>
+              <a:t>•  State puede contener contraseñas, claves y metadatos sensibles. Marcar una variable sensitive oculta su presentación en CLI, pero no impide necesariamente almacenarla. Terraform actual incorpora…</a:t>
+            </a:r>
+          </a:p>
+          <a:p>
+            <a:pPr>
+              <a:spcAft>
+                <a:spcPts val="600"/>
+              </a:spcAft>
+            </a:pPr>
+            <a:r>
+              <a:rPr sz="1500">
+                <a:solidFill>
+                  <a:srgbClr val="22282E"/>
+                </a:solidFill>
+              </a:rPr>
+              <a:t>•  Leer un secreto desde Vault mediante un data source puede escribirlo igualmente en state si un recurso lo conserva. «Usar un vault» no es suficiente: se revisa el flujo completo desde obtención hasta…</a:t>
+            </a:r>
+          </a:p>
+          <a:p>
+            <a:pPr>
+              <a:spcAft>
+                <a:spcPts val="600"/>
+              </a:spcAft>
+            </a:pPr>
+            <a:r>
+              <a:rPr sz="1500">
+                <a:solidFill>
+                  <a:srgbClr val="22282E"/>
+                </a:solidFill>
+              </a:rPr>
+              <a:t>•  tfsec y Checkov aplican reglas sobre configuración; OPA o Sentinel pueden evaluar JSON del plan. Las políticas deben probarse con casos permitidos, denegados y valores desconocidos. Una regla «todo…</a:t>
+            </a:r>
+          </a:p>
+          <a:p>
+            <a:pPr>
+              <a:spcAft>
+                <a:spcPts val="600"/>
+              </a:spcAft>
+            </a:pPr>
+            <a:r>
+              <a:rPr sz="1500">
+                <a:solidFill>
+                  <a:srgbClr val="22282E"/>
+                </a:solidFill>
+              </a:rPr>
+              <a:t>•  terraform plan actualiza estado observado según modo y puede revelar cambios externos, pero la detección depende de credenciales, refresh y recursos gestionados. Un recurso fuera del state no aparece…</a:t>
             </a:r>
           </a:p>
         </p:txBody>
@@ -4316,7 +4902,7 @@
                   <a:srgbClr val="0B3D2E"/>
                 </a:solidFill>
               </a:rPr>
-              <a:t>🧰 Herramientas y preparación</a:t>
+              <a:t>📖 Definiciones y características</a:t>
             </a:r>
           </a:p>
         </p:txBody>
@@ -4354,97 +4940,97 @@
                   <a:srgbClr val="22282E"/>
                 </a:solidFill>
               </a:rPr>
-              <a:t>•  Terraform instalado y un proveedor de laboratorio configurado.</a:t>
-            </a:r>
-          </a:p>
-          <a:p>
-            <a:pPr>
-              <a:spcAft>
-                <a:spcPts val="600"/>
-              </a:spcAft>
-            </a:pPr>
-            <a:r>
-              <a:rPr sz="1500">
-                <a:solidFill>
-                  <a:srgbClr val="22282E"/>
-                </a:solidFill>
-              </a:rPr>
-              <a:t>•  tfsec, Checkov y terrascan para escaneo estático.</a:t>
-            </a:r>
-          </a:p>
-          <a:p>
-            <a:pPr>
-              <a:spcAft>
-                <a:spcPts val="600"/>
-              </a:spcAft>
-            </a:pPr>
-            <a:r>
-              <a:rPr sz="1500">
-                <a:solidFill>
-                  <a:srgbClr val="22282E"/>
-                </a:solidFill>
-              </a:rPr>
-              <a:t>•  OPA/Conftest para policy-as-code.</a:t>
-            </a:r>
-          </a:p>
-          <a:p>
-            <a:pPr>
-              <a:spcAft>
-                <a:spcPts val="600"/>
-              </a:spcAft>
-            </a:pPr>
-            <a:r>
-              <a:rPr sz="1500">
-                <a:solidFill>
-                  <a:srgbClr val="22282E"/>
-                </a:solidFill>
-              </a:rPr>
-              <a:t>•  tfsec .</a:t>
-            </a:r>
-          </a:p>
-          <a:p>
-            <a:pPr>
-              <a:spcAft>
-                <a:spcPts val="600"/>
-              </a:spcAft>
-            </a:pPr>
-            <a:r>
-              <a:rPr sz="1500">
-                <a:solidFill>
-                  <a:srgbClr val="22282E"/>
-                </a:solidFill>
-              </a:rPr>
-              <a:t>•  checkov -d .</a:t>
-            </a:r>
-          </a:p>
-          <a:p>
-            <a:pPr>
-              <a:spcAft>
-                <a:spcPts val="600"/>
-              </a:spcAft>
-            </a:pPr>
-            <a:r>
-              <a:rPr sz="1500">
-                <a:solidFill>
-                  <a:srgbClr val="22282E"/>
-                </a:solidFill>
-              </a:rPr>
-              <a:t>•  terraform plan -out plan.tfplan &amp;&amp; terraform show -json plan.tfplan &gt; plan.json</a:t>
-            </a:r>
-          </a:p>
-          <a:p>
-            <a:pPr>
-              <a:spcAft>
-                <a:spcPts val="600"/>
-              </a:spcAft>
-            </a:pPr>
-            <a:r>
-              <a:rPr sz="1500">
-                <a:solidFill>
-                  <a:srgbClr val="22282E"/>
-                </a:solidFill>
-              </a:rPr>
-              <a:t>•  conftest test plan.json</a:t>
+              <a:t>•  Infrastructure as Code (IaC): definir infraestructura en archivos versionados. Clave: auditable y reproducible, pero un error se replica a escala.</a:t>
+            </a:r>
+          </a:p>
+          <a:p>
+            <a:pPr>
+              <a:spcAft>
+                <a:spcPts val="600"/>
+              </a:spcAft>
+            </a:pPr>
+            <a:r>
+              <a:rPr sz="1500">
+                <a:solidFill>
+                  <a:srgbClr val="22282E"/>
+                </a:solidFill>
+              </a:rPr>
+              <a:t>•  Terraform state: archivo con el mapeo entre código y recursos reales. Clave: puede contener secretos en texto plano; protégelo.</a:t>
+            </a:r>
+          </a:p>
+          <a:p>
+            <a:pPr>
+              <a:spcAft>
+                <a:spcPts val="600"/>
+              </a:spcAft>
+            </a:pPr>
+            <a:r>
+              <a:rPr sz="1500">
+                <a:solidFill>
+                  <a:srgbClr val="22282E"/>
+                </a:solidFill>
+              </a:rPr>
+              <a:t>•  Drift: divergencia entre estado deseado, state y objeto remoto. Clave: plan puede revelar cambios de recursos gestionados según refresh, permisos y provider; no inventaría recursos desconocidos.</a:t>
+            </a:r>
+          </a:p>
+          <a:p>
+            <a:pPr>
+              <a:spcAft>
+                <a:spcPts val="600"/>
+              </a:spcAft>
+            </a:pPr>
+            <a:r>
+              <a:rPr sz="1500">
+                <a:solidFill>
+                  <a:srgbClr val="22282E"/>
+                </a:solidFill>
+              </a:rPr>
+              <a:t>•  tfsec / Checkov: escáneres estáticos de IaC. Clave: encuentran buckets públicos, SG abiertos, cifrado ausente.</a:t>
+            </a:r>
+          </a:p>
+          <a:p>
+            <a:pPr>
+              <a:spcAft>
+                <a:spcPts val="600"/>
+              </a:spcAft>
+            </a:pPr>
+            <a:r>
+              <a:rPr sz="1500">
+                <a:solidFill>
+                  <a:srgbClr val="22282E"/>
+                </a:solidFill>
+              </a:rPr>
+              <a:t>•  Policy-as-code: reglas (OPA/Rego, Sentinel) que aprueban o bloquean planes. Clave: impide desplegar lo no conforme.</a:t>
+            </a:r>
+          </a:p>
+          <a:p>
+            <a:pPr>
+              <a:spcAft>
+                <a:spcPts val="600"/>
+              </a:spcAft>
+            </a:pPr>
+            <a:r>
+              <a:rPr sz="1500">
+                <a:solidFill>
+                  <a:srgbClr val="22282E"/>
+                </a:solidFill>
+              </a:rPr>
+              <a:t>•  Backend remoto: almacenamiento coordinado del state. Clave: capacidades de cifrado, locking, acceso, auditoría y recuperación dependen del backend y versión.</a:t>
+            </a:r>
+          </a:p>
+          <a:p>
+            <a:pPr>
+              <a:spcAft>
+                <a:spcPts val="600"/>
+              </a:spcAft>
+            </a:pPr>
+            <a:r>
+              <a:rPr sz="1500">
+                <a:solidFill>
+                  <a:srgbClr val="22282E"/>
+                </a:solidFill>
+              </a:rPr>
+              <a:t>•  Módulo: paquete reutilizable de Terraform. Clave: verifica origen y versión para la cadena de suministro.</a:t>
             </a:r>
           </a:p>
         </p:txBody>
@@ -4495,7 +5081,7 @@
                   <a:srgbClr val="0B3D2E"/>
                 </a:solidFill>
               </a:rPr>
-              <a:t>🧪 Laboratorio guiado</a:t>
+              <a:t>🔍 Caso razonado — contraseña marcada `sensitive` que sigue en state</a:t>
             </a:r>
           </a:p>
         </p:txBody>
@@ -4533,97 +5119,22 @@
                   <a:srgbClr val="22282E"/>
                 </a:solidFill>
               </a:rPr>
-              <a:t>•  Escribe un módulo Terraform inseguro: un bucket con acl = "public-read", un security group con 0.0.0.0/0 en el puerto 22 y un recurso sin cifrado.</a:t>
-            </a:r>
-          </a:p>
-          <a:p>
-            <a:pPr>
-              <a:spcAft>
-                <a:spcPts val="600"/>
-              </a:spcAft>
-            </a:pPr>
-            <a:r>
-              <a:rPr sz="1500">
-                <a:solidFill>
-                  <a:srgbClr val="22282E"/>
-                </a:solidFill>
-              </a:rPr>
-              <a:t>•  Ejecuta tfsec . y checkov -d .; anota los identificadores de cada hallazgo y su severidad.</a:t>
-            </a:r>
-          </a:p>
-          <a:p>
-            <a:pPr>
-              <a:spcAft>
-                <a:spcPts val="600"/>
-              </a:spcAft>
-            </a:pPr>
-            <a:r>
-              <a:rPr sz="1500">
-                <a:solidFill>
-                  <a:srgbClr val="22282E"/>
-                </a:solidFill>
-              </a:rPr>
-              <a:t>•  Corrige el código: bloquea acceso público, restringe el SG a un rango, activa cifrado en reposo. Reejecuta los escáneres hasta 0 hallazgos altos.</a:t>
-            </a:r>
-          </a:p>
-          <a:p>
-            <a:pPr>
-              <a:spcAft>
-                <a:spcPts val="600"/>
-              </a:spcAft>
-            </a:pPr>
-            <a:r>
-              <a:rPr sz="1500">
-                <a:solidFill>
-                  <a:srgbClr val="22282E"/>
-                </a:solidFill>
-              </a:rPr>
-              <a:t>•  Configura un backend remoto cifrado con bloqueo (por ejemplo S3 + DynamoDB) y verifica que el state ya no queda en local sin protección.</a:t>
-            </a:r>
-          </a:p>
-          <a:p>
-            <a:pPr>
-              <a:spcAft>
-                <a:spcPts val="600"/>
-              </a:spcAft>
-            </a:pPr>
-            <a:r>
-              <a:rPr sz="1500">
-                <a:solidFill>
-                  <a:srgbClr val="22282E"/>
-                </a:solidFill>
-              </a:rPr>
-              <a:t>•  Elimina cualquier secreto del código; inyéctalo desde variables de entorno o un gestor de secretos y comprueba que no aparece en el .tf.</a:t>
-            </a:r>
-          </a:p>
-          <a:p>
-            <a:pPr>
-              <a:spcAft>
-                <a:spcPts val="600"/>
-              </a:spcAft>
-            </a:pPr>
-            <a:r>
-              <a:rPr sz="1500">
-                <a:solidFill>
-                  <a:srgbClr val="22282E"/>
-                </a:solidFill>
-              </a:rPr>
-              <a:t>•  Escribe una política OPA/Conftest que rechace planes con recursos sin cifrado o con acceso público, e intégrala tras terraform plan.</a:t>
-            </a:r>
-          </a:p>
-          <a:p>
-            <a:pPr>
-              <a:spcAft>
-                <a:spcPts val="600"/>
-              </a:spcAft>
-            </a:pPr>
-            <a:r>
-              <a:rPr sz="1500">
-                <a:solidFill>
-                  <a:srgbClr val="22282E"/>
-                </a:solidFill>
-              </a:rPr>
-              <a:t>•  Simula el pipeline: fmt → validate → tfsec/checkov → plan → conftest → (aprobación) → apply. Falla el pipeline si el escaneo encuentra un hallazgo crítico.</a:t>
+              <a:t>•  Un módulo recibe dbpassword con sensitive = true. La salida CLI la oculta, pero el provider la conserva en el atributo del recurso y aparece en el state. El equipo confirma el comportamiento sobre un…</a:t>
+            </a:r>
+          </a:p>
+          <a:p>
+            <a:pPr>
+              <a:spcAft>
+                <a:spcPts val="600"/>
+              </a:spcAft>
+            </a:pPr>
+            <a:r>
+              <a:rPr sz="1500">
+                <a:solidFill>
+                  <a:srgbClr val="22282E"/>
+                </a:solidFill>
+              </a:rPr>
+              <a:t>•  Checkov deja pasar el código después del cambio, pero la verificación no termina allí: se inspecciona el plan JSON, se limita el rol CI, se prueba una policy que bloquea exposición pública y se…</a:t>
             </a:r>
           </a:p>
         </p:txBody>
@@ -4674,7 +5185,7 @@
                   <a:srgbClr val="0B3D2E"/>
                 </a:solidFill>
               </a:rPr>
-              <a:t>✍️ Ejercicios</a:t>
+              <a:t>✅ Criterio de dominio</a:t>
             </a:r>
           </a:p>
         </p:txBody>
@@ -4712,82 +5223,7 @@
                   <a:srgbClr val="22282E"/>
                 </a:solidFill>
               </a:rPr>
-              <a:t>•  Corrige un hallazgo concreto de tfsec y documenta la regla que lo detectó.</a:t>
-            </a:r>
-          </a:p>
-          <a:p>
-            <a:pPr>
-              <a:spcAft>
-                <a:spcPts val="600"/>
-              </a:spcAft>
-            </a:pPr>
-            <a:r>
-              <a:rPr sz="1500">
-                <a:solidFill>
-                  <a:srgbClr val="22282E"/>
-                </a:solidFill>
-              </a:rPr>
-              <a:t>•  Migra un state local a un backend remoto cifrado con bloqueo.</a:t>
-            </a:r>
-          </a:p>
-          <a:p>
-            <a:pPr>
-              <a:spcAft>
-                <a:spcPts val="600"/>
-              </a:spcAft>
-            </a:pPr>
-            <a:r>
-              <a:rPr sz="1500">
-                <a:solidFill>
-                  <a:srgbClr val="22282E"/>
-                </a:solidFill>
-              </a:rPr>
-              <a:t>•  Escribe una política Rego que exija etiquetas obligatorias en todos los recursos.</a:t>
-            </a:r>
-          </a:p>
-          <a:p>
-            <a:pPr>
-              <a:spcAft>
-                <a:spcPts val="600"/>
-              </a:spcAft>
-            </a:pPr>
-            <a:r>
-              <a:rPr sz="1500">
-                <a:solidFill>
-                  <a:srgbClr val="22282E"/>
-                </a:solidFill>
-              </a:rPr>
-              <a:t>•  Detecta drift introduciendo un cambio manual y ejecutando terraform plan.</a:t>
-            </a:r>
-          </a:p>
-          <a:p>
-            <a:pPr>
-              <a:spcAft>
-                <a:spcPts val="600"/>
-              </a:spcAft>
-            </a:pPr>
-            <a:r>
-              <a:rPr sz="1500">
-                <a:solidFill>
-                  <a:srgbClr val="22282E"/>
-                </a:solidFill>
-              </a:rPr>
-              <a:t>•  Fija (pin) la versión de un módulo y de un proveedor y explica por qué.</a:t>
-            </a:r>
-          </a:p>
-          <a:p>
-            <a:pPr>
-              <a:spcAft>
-                <a:spcPts val="600"/>
-              </a:spcAft>
-            </a:pPr>
-            <a:r>
-              <a:rPr sz="1500">
-                <a:solidFill>
-                  <a:srgbClr val="22282E"/>
-                </a:solidFill>
-              </a:rPr>
-              <a:t>•  Integra el escaneo IaC como paso obligatorio en un workflow de CI.</a:t>
+              <a:t>•  Dominas la clase cuando puedes explicar HCL–plan–state–cloud, demostrar qué valor sensible persiste, fijar providers y módulos, escribir una policy con pruebas y límites, y detectar drift declarando…</a:t>
             </a:r>
           </a:p>
         </p:txBody>
@@ -4838,7 +5274,7 @@
                   <a:srgbClr val="0B3D2E"/>
                 </a:solidFill>
               </a:rPr>
-              <a:t>📝 Reto verificable</a:t>
+              <a:t>🧰 Herramientas y preparación</a:t>
             </a:r>
           </a:p>
         </p:txBody>
@@ -4876,82 +5312,37 @@
                   <a:srgbClr val="22282E"/>
                 </a:solidFill>
               </a:rPr>
-              <a:t>•  Toma un repositorio Terraform con misconfiguraciones y déjalo "verde": sin hallazgos críticos en</a:t>
-            </a:r>
-          </a:p>
-          <a:p>
-            <a:pPr>
-              <a:spcAft>
-                <a:spcPts val="600"/>
-              </a:spcAft>
-            </a:pPr>
-            <a:r>
-              <a:rPr sz="1500">
-                <a:solidFill>
-                  <a:srgbClr val="22282E"/>
-                </a:solidFill>
-              </a:rPr>
-              <a:t>•  tfsec/Checkov, con state remoto cifrado y bloqueado, sin secretos en el código, y con una policy OPA</a:t>
-            </a:r>
-          </a:p>
-          <a:p>
-            <a:pPr>
-              <a:spcAft>
-                <a:spcPts val="600"/>
-              </a:spcAft>
-            </a:pPr>
-            <a:r>
-              <a:rPr sz="1500">
-                <a:solidFill>
-                  <a:srgbClr val="22282E"/>
-                </a:solidFill>
-              </a:rPr>
-              <a:t>•  que bloquea recursos inseguros en el pipeline.</a:t>
-            </a:r>
-          </a:p>
-          <a:p>
-            <a:pPr>
-              <a:spcAft>
-                <a:spcPts val="600"/>
-              </a:spcAft>
-            </a:pPr>
-            <a:r>
-              <a:rPr sz="1500">
-                <a:solidFill>
-                  <a:srgbClr val="22282E"/>
-                </a:solidFill>
-              </a:rPr>
-              <a:t>•  Criterio de aceptación: tfsec y checkov reportan 0 hallazgos críticos/altos, conftest</a:t>
-            </a:r>
-          </a:p>
-          <a:p>
-            <a:pPr>
-              <a:spcAft>
-                <a:spcPts val="600"/>
-              </a:spcAft>
-            </a:pPr>
-            <a:r>
-              <a:rPr sz="1500">
-                <a:solidFill>
-                  <a:srgbClr val="22282E"/>
-                </a:solidFill>
-              </a:rPr>
-              <a:t>•  rechaza un plan que reintroduzca un bucket público, y no hay ningún secreto en texto plano en los</a:t>
-            </a:r>
-          </a:p>
-          <a:p>
-            <a:pPr>
-              <a:spcAft>
-                <a:spcPts val="600"/>
-              </a:spcAft>
-            </a:pPr>
-            <a:r>
-              <a:rPr sz="1500">
-                <a:solidFill>
-                  <a:srgbClr val="22282E"/>
-                </a:solidFill>
-              </a:rPr>
-              <a:t>•  .tf ni en el backend.</a:t>
+              <a:t>•  Terraform instalado y un proveedor de laboratorio configurado.</a:t>
+            </a:r>
+          </a:p>
+          <a:p>
+            <a:pPr>
+              <a:spcAft>
+                <a:spcPts val="600"/>
+              </a:spcAft>
+            </a:pPr>
+            <a:r>
+              <a:rPr sz="1500">
+                <a:solidFill>
+                  <a:srgbClr val="22282E"/>
+                </a:solidFill>
+              </a:rPr>
+              <a:t>•  tfsec, Checkov y terrascan para escaneo estático.</a:t>
+            </a:r>
+          </a:p>
+          <a:p>
+            <a:pPr>
+              <a:spcAft>
+                <a:spcPts val="600"/>
+              </a:spcAft>
+            </a:pPr>
+            <a:r>
+              <a:rPr sz="1500">
+                <a:solidFill>
+                  <a:srgbClr val="22282E"/>
+                </a:solidFill>
+              </a:rPr>
+              <a:t>•  OPA/Conftest para policy-as-code.</a:t>
             </a:r>
           </a:p>
         </p:txBody>
